--- a/Presentation/Project 4 Mobile Phones Prediction .pptx
+++ b/Presentation/Project 4 Mobile Phones Prediction .pptx
@@ -121,6 +121,22 @@
       </a:defRPr>
     </a:lvl9pPr>
   </p:defaultTextStyle>
+  <p:extLst>
+    <p:ext uri="{EFAFB233-063F-42B5-8137-9DF3F51BA10A}">
+      <p15:sldGuideLst xmlns:p15="http://schemas.microsoft.com/office/powerpoint/2012/main">
+        <p15:guide id="1" orient="horz" pos="2160">
+          <p15:clr>
+            <a:srgbClr val="A4A3A4"/>
+          </p15:clr>
+        </p15:guide>
+        <p15:guide id="2" pos="2880">
+          <p15:clr>
+            <a:srgbClr val="A4A3A4"/>
+          </p15:clr>
+        </p15:guide>
+      </p15:sldGuideLst>
+    </p:ext>
+  </p:extLst>
 </p:presentation>
 </file>
 
@@ -206,7 +222,7 @@
           <a:p>
             <a:fld id="{3638E1A5-DF98-4D7F-AAA4-8C7107BFDE37}" type="datetimeFigureOut">
               <a:rPr lang="en-IN" smtClean="0"/>
-              <a:t>04-07-2026</a:t>
+              <a:t>14-07-2026</a:t>
             </a:fld>
             <a:endParaRPr lang="en-IN"/>
           </a:p>
@@ -270,35 +286,35 @@
           <a:p>
             <a:pPr lvl="0"/>
             <a:r>
-              <a:rPr lang="en-US" smtClean="0"/>
+              <a:rPr lang="en-US"/>
               <a:t>Click to edit Master text styles</a:t>
             </a:r>
           </a:p>
           <a:p>
             <a:pPr lvl="1"/>
             <a:r>
-              <a:rPr lang="en-US" smtClean="0"/>
+              <a:rPr lang="en-US"/>
               <a:t>Second level</a:t>
             </a:r>
           </a:p>
           <a:p>
             <a:pPr lvl="2"/>
             <a:r>
-              <a:rPr lang="en-US" smtClean="0"/>
+              <a:rPr lang="en-US"/>
               <a:t>Third level</a:t>
             </a:r>
           </a:p>
           <a:p>
             <a:pPr lvl="3"/>
             <a:r>
-              <a:rPr lang="en-US" smtClean="0"/>
+              <a:rPr lang="en-US"/>
               <a:t>Fourth level</a:t>
             </a:r>
           </a:p>
           <a:p>
             <a:pPr lvl="4"/>
             <a:r>
-              <a:rPr lang="en-US" smtClean="0"/>
+              <a:rPr lang="en-US"/>
               <a:t>Fifth level</a:t>
             </a:r>
             <a:endParaRPr lang="en-IN"/>
@@ -512,7 +528,7 @@
           <a:lstStyle/>
           <a:p>
             <a:r>
-              <a:rPr lang="en-US" smtClean="0"/>
+              <a:rPr lang="en-US"/>
               <a:t>Click to edit Master title style</a:t>
             </a:r>
             <a:endParaRPr lang="en-IN"/>
@@ -631,7 +647,7 @@
           </a:lstStyle>
           <a:p>
             <a:r>
-              <a:rPr lang="en-US" smtClean="0"/>
+              <a:rPr lang="en-US"/>
               <a:t>Click to edit Master subtitle style</a:t>
             </a:r>
             <a:endParaRPr lang="en-IN"/>
@@ -655,7 +671,7 @@
           <a:p>
             <a:fld id="{22B1BDCD-9193-4860-B347-94AD08F8FD51}" type="datetimeFigureOut">
               <a:rPr lang="en-IN" smtClean="0"/>
-              <a:t>04-07-2026</a:t>
+              <a:t>14-07-2026</a:t>
             </a:fld>
             <a:endParaRPr lang="en-IN"/>
           </a:p>
@@ -749,7 +765,7 @@
           <a:lstStyle/>
           <a:p>
             <a:r>
-              <a:rPr lang="en-US" smtClean="0"/>
+              <a:rPr lang="en-US"/>
               <a:t>Click to edit Master title style</a:t>
             </a:r>
             <a:endParaRPr lang="en-IN"/>
@@ -773,35 +789,35 @@
           <a:p>
             <a:pPr lvl="0"/>
             <a:r>
-              <a:rPr lang="en-US" smtClean="0"/>
+              <a:rPr lang="en-US"/>
               <a:t>Click to edit Master text styles</a:t>
             </a:r>
           </a:p>
           <a:p>
             <a:pPr lvl="1"/>
             <a:r>
-              <a:rPr lang="en-US" smtClean="0"/>
+              <a:rPr lang="en-US"/>
               <a:t>Second level</a:t>
             </a:r>
           </a:p>
           <a:p>
             <a:pPr lvl="2"/>
             <a:r>
-              <a:rPr lang="en-US" smtClean="0"/>
+              <a:rPr lang="en-US"/>
               <a:t>Third level</a:t>
             </a:r>
           </a:p>
           <a:p>
             <a:pPr lvl="3"/>
             <a:r>
-              <a:rPr lang="en-US" smtClean="0"/>
+              <a:rPr lang="en-US"/>
               <a:t>Fourth level</a:t>
             </a:r>
           </a:p>
           <a:p>
             <a:pPr lvl="4"/>
             <a:r>
-              <a:rPr lang="en-US" smtClean="0"/>
+              <a:rPr lang="en-US"/>
               <a:t>Fifth level</a:t>
             </a:r>
             <a:endParaRPr lang="en-IN"/>
@@ -825,7 +841,7 @@
           <a:p>
             <a:fld id="{22B1BDCD-9193-4860-B347-94AD08F8FD51}" type="datetimeFigureOut">
               <a:rPr lang="en-IN" smtClean="0"/>
-              <a:t>04-07-2026</a:t>
+              <a:t>14-07-2026</a:t>
             </a:fld>
             <a:endParaRPr lang="en-IN"/>
           </a:p>
@@ -924,7 +940,7 @@
           <a:lstStyle/>
           <a:p>
             <a:r>
-              <a:rPr lang="en-US" smtClean="0"/>
+              <a:rPr lang="en-US"/>
               <a:t>Click to edit Master title style</a:t>
             </a:r>
             <a:endParaRPr lang="en-IN"/>
@@ -953,35 +969,35 @@
           <a:p>
             <a:pPr lvl="0"/>
             <a:r>
-              <a:rPr lang="en-US" smtClean="0"/>
+              <a:rPr lang="en-US"/>
               <a:t>Click to edit Master text styles</a:t>
             </a:r>
           </a:p>
           <a:p>
             <a:pPr lvl="1"/>
             <a:r>
-              <a:rPr lang="en-US" smtClean="0"/>
+              <a:rPr lang="en-US"/>
               <a:t>Second level</a:t>
             </a:r>
           </a:p>
           <a:p>
             <a:pPr lvl="2"/>
             <a:r>
-              <a:rPr lang="en-US" smtClean="0"/>
+              <a:rPr lang="en-US"/>
               <a:t>Third level</a:t>
             </a:r>
           </a:p>
           <a:p>
             <a:pPr lvl="3"/>
             <a:r>
-              <a:rPr lang="en-US" smtClean="0"/>
+              <a:rPr lang="en-US"/>
               <a:t>Fourth level</a:t>
             </a:r>
           </a:p>
           <a:p>
             <a:pPr lvl="4"/>
             <a:r>
-              <a:rPr lang="en-US" smtClean="0"/>
+              <a:rPr lang="en-US"/>
               <a:t>Fifth level</a:t>
             </a:r>
             <a:endParaRPr lang="en-IN"/>
@@ -1005,7 +1021,7 @@
           <a:p>
             <a:fld id="{22B1BDCD-9193-4860-B347-94AD08F8FD51}" type="datetimeFigureOut">
               <a:rPr lang="en-IN" smtClean="0"/>
-              <a:t>04-07-2026</a:t>
+              <a:t>14-07-2026</a:t>
             </a:fld>
             <a:endParaRPr lang="en-IN"/>
           </a:p>
@@ -1099,7 +1115,7 @@
           <a:lstStyle/>
           <a:p>
             <a:r>
-              <a:rPr lang="en-US" smtClean="0"/>
+              <a:rPr lang="en-US"/>
               <a:t>Click to edit Master title style</a:t>
             </a:r>
             <a:endParaRPr lang="en-IN"/>
@@ -1123,35 +1139,35 @@
           <a:p>
             <a:pPr lvl="0"/>
             <a:r>
-              <a:rPr lang="en-US" smtClean="0"/>
+              <a:rPr lang="en-US"/>
               <a:t>Click to edit Master text styles</a:t>
             </a:r>
           </a:p>
           <a:p>
             <a:pPr lvl="1"/>
             <a:r>
-              <a:rPr lang="en-US" smtClean="0"/>
+              <a:rPr lang="en-US"/>
               <a:t>Second level</a:t>
             </a:r>
           </a:p>
           <a:p>
             <a:pPr lvl="2"/>
             <a:r>
-              <a:rPr lang="en-US" smtClean="0"/>
+              <a:rPr lang="en-US"/>
               <a:t>Third level</a:t>
             </a:r>
           </a:p>
           <a:p>
             <a:pPr lvl="3"/>
             <a:r>
-              <a:rPr lang="en-US" smtClean="0"/>
+              <a:rPr lang="en-US"/>
               <a:t>Fourth level</a:t>
             </a:r>
           </a:p>
           <a:p>
             <a:pPr lvl="4"/>
             <a:r>
-              <a:rPr lang="en-US" smtClean="0"/>
+              <a:rPr lang="en-US"/>
               <a:t>Fifth level</a:t>
             </a:r>
             <a:endParaRPr lang="en-IN"/>
@@ -1175,7 +1191,7 @@
           <a:p>
             <a:fld id="{22B1BDCD-9193-4860-B347-94AD08F8FD51}" type="datetimeFigureOut">
               <a:rPr lang="en-IN" smtClean="0"/>
-              <a:t>04-07-2026</a:t>
+              <a:t>14-07-2026</a:t>
             </a:fld>
             <a:endParaRPr lang="en-IN"/>
           </a:p>
@@ -1278,7 +1294,7 @@
           </a:lstStyle>
           <a:p>
             <a:r>
-              <a:rPr lang="en-US" smtClean="0"/>
+              <a:rPr lang="en-US"/>
               <a:t>Click to edit Master title style</a:t>
             </a:r>
             <a:endParaRPr lang="en-IN"/>
@@ -1398,7 +1414,7 @@
           <a:p>
             <a:pPr lvl="0"/>
             <a:r>
-              <a:rPr lang="en-US" smtClean="0"/>
+              <a:rPr lang="en-US"/>
               <a:t>Click to edit Master text styles</a:t>
             </a:r>
           </a:p>
@@ -1421,7 +1437,7 @@
           <a:p>
             <a:fld id="{22B1BDCD-9193-4860-B347-94AD08F8FD51}" type="datetimeFigureOut">
               <a:rPr lang="en-IN" smtClean="0"/>
-              <a:t>04-07-2026</a:t>
+              <a:t>14-07-2026</a:t>
             </a:fld>
             <a:endParaRPr lang="en-IN"/>
           </a:p>
@@ -1515,7 +1531,7 @@
           <a:lstStyle/>
           <a:p>
             <a:r>
-              <a:rPr lang="en-US" smtClean="0"/>
+              <a:rPr lang="en-US"/>
               <a:t>Click to edit Master title style</a:t>
             </a:r>
             <a:endParaRPr lang="en-IN"/>
@@ -1572,35 +1588,35 @@
           <a:p>
             <a:pPr lvl="0"/>
             <a:r>
-              <a:rPr lang="en-US" smtClean="0"/>
+              <a:rPr lang="en-US"/>
               <a:t>Click to edit Master text styles</a:t>
             </a:r>
           </a:p>
           <a:p>
             <a:pPr lvl="1"/>
             <a:r>
-              <a:rPr lang="en-US" smtClean="0"/>
+              <a:rPr lang="en-US"/>
               <a:t>Second level</a:t>
             </a:r>
           </a:p>
           <a:p>
             <a:pPr lvl="2"/>
             <a:r>
-              <a:rPr lang="en-US" smtClean="0"/>
+              <a:rPr lang="en-US"/>
               <a:t>Third level</a:t>
             </a:r>
           </a:p>
           <a:p>
             <a:pPr lvl="3"/>
             <a:r>
-              <a:rPr lang="en-US" smtClean="0"/>
+              <a:rPr lang="en-US"/>
               <a:t>Fourth level</a:t>
             </a:r>
           </a:p>
           <a:p>
             <a:pPr lvl="4"/>
             <a:r>
-              <a:rPr lang="en-US" smtClean="0"/>
+              <a:rPr lang="en-US"/>
               <a:t>Fifth level</a:t>
             </a:r>
             <a:endParaRPr lang="en-IN"/>
@@ -1657,35 +1673,35 @@
           <a:p>
             <a:pPr lvl="0"/>
             <a:r>
-              <a:rPr lang="en-US" smtClean="0"/>
+              <a:rPr lang="en-US"/>
               <a:t>Click to edit Master text styles</a:t>
             </a:r>
           </a:p>
           <a:p>
             <a:pPr lvl="1"/>
             <a:r>
-              <a:rPr lang="en-US" smtClean="0"/>
+              <a:rPr lang="en-US"/>
               <a:t>Second level</a:t>
             </a:r>
           </a:p>
           <a:p>
             <a:pPr lvl="2"/>
             <a:r>
-              <a:rPr lang="en-US" smtClean="0"/>
+              <a:rPr lang="en-US"/>
               <a:t>Third level</a:t>
             </a:r>
           </a:p>
           <a:p>
             <a:pPr lvl="3"/>
             <a:r>
-              <a:rPr lang="en-US" smtClean="0"/>
+              <a:rPr lang="en-US"/>
               <a:t>Fourth level</a:t>
             </a:r>
           </a:p>
           <a:p>
             <a:pPr lvl="4"/>
             <a:r>
-              <a:rPr lang="en-US" smtClean="0"/>
+              <a:rPr lang="en-US"/>
               <a:t>Fifth level</a:t>
             </a:r>
             <a:endParaRPr lang="en-IN"/>
@@ -1709,7 +1725,7 @@
           <a:p>
             <a:fld id="{22B1BDCD-9193-4860-B347-94AD08F8FD51}" type="datetimeFigureOut">
               <a:rPr lang="en-IN" smtClean="0"/>
-              <a:t>04-07-2026</a:t>
+              <a:t>14-07-2026</a:t>
             </a:fld>
             <a:endParaRPr lang="en-IN"/>
           </a:p>
@@ -1807,7 +1823,7 @@
           </a:lstStyle>
           <a:p>
             <a:r>
-              <a:rPr lang="en-US" smtClean="0"/>
+              <a:rPr lang="en-US"/>
               <a:t>Click to edit Master title style</a:t>
             </a:r>
             <a:endParaRPr lang="en-IN"/>
@@ -1873,7 +1889,7 @@
           <a:p>
             <a:pPr lvl="0"/>
             <a:r>
-              <a:rPr lang="en-US" smtClean="0"/>
+              <a:rPr lang="en-US"/>
               <a:t>Click to edit Master text styles</a:t>
             </a:r>
           </a:p>
@@ -1929,35 +1945,35 @@
           <a:p>
             <a:pPr lvl="0"/>
             <a:r>
-              <a:rPr lang="en-US" smtClean="0"/>
+              <a:rPr lang="en-US"/>
               <a:t>Click to edit Master text styles</a:t>
             </a:r>
           </a:p>
           <a:p>
             <a:pPr lvl="1"/>
             <a:r>
-              <a:rPr lang="en-US" smtClean="0"/>
+              <a:rPr lang="en-US"/>
               <a:t>Second level</a:t>
             </a:r>
           </a:p>
           <a:p>
             <a:pPr lvl="2"/>
             <a:r>
-              <a:rPr lang="en-US" smtClean="0"/>
+              <a:rPr lang="en-US"/>
               <a:t>Third level</a:t>
             </a:r>
           </a:p>
           <a:p>
             <a:pPr lvl="3"/>
             <a:r>
-              <a:rPr lang="en-US" smtClean="0"/>
+              <a:rPr lang="en-US"/>
               <a:t>Fourth level</a:t>
             </a:r>
           </a:p>
           <a:p>
             <a:pPr lvl="4"/>
             <a:r>
-              <a:rPr lang="en-US" smtClean="0"/>
+              <a:rPr lang="en-US"/>
               <a:t>Fifth level</a:t>
             </a:r>
             <a:endParaRPr lang="en-IN"/>
@@ -2023,7 +2039,7 @@
           <a:p>
             <a:pPr lvl="0"/>
             <a:r>
-              <a:rPr lang="en-US" smtClean="0"/>
+              <a:rPr lang="en-US"/>
               <a:t>Click to edit Master text styles</a:t>
             </a:r>
           </a:p>
@@ -2079,35 +2095,35 @@
           <a:p>
             <a:pPr lvl="0"/>
             <a:r>
-              <a:rPr lang="en-US" smtClean="0"/>
+              <a:rPr lang="en-US"/>
               <a:t>Click to edit Master text styles</a:t>
             </a:r>
           </a:p>
           <a:p>
             <a:pPr lvl="1"/>
             <a:r>
-              <a:rPr lang="en-US" smtClean="0"/>
+              <a:rPr lang="en-US"/>
               <a:t>Second level</a:t>
             </a:r>
           </a:p>
           <a:p>
             <a:pPr lvl="2"/>
             <a:r>
-              <a:rPr lang="en-US" smtClean="0"/>
+              <a:rPr lang="en-US"/>
               <a:t>Third level</a:t>
             </a:r>
           </a:p>
           <a:p>
             <a:pPr lvl="3"/>
             <a:r>
-              <a:rPr lang="en-US" smtClean="0"/>
+              <a:rPr lang="en-US"/>
               <a:t>Fourth level</a:t>
             </a:r>
           </a:p>
           <a:p>
             <a:pPr lvl="4"/>
             <a:r>
-              <a:rPr lang="en-US" smtClean="0"/>
+              <a:rPr lang="en-US"/>
               <a:t>Fifth level</a:t>
             </a:r>
             <a:endParaRPr lang="en-IN"/>
@@ -2131,7 +2147,7 @@
           <a:p>
             <a:fld id="{22B1BDCD-9193-4860-B347-94AD08F8FD51}" type="datetimeFigureOut">
               <a:rPr lang="en-IN" smtClean="0"/>
-              <a:t>04-07-2026</a:t>
+              <a:t>14-07-2026</a:t>
             </a:fld>
             <a:endParaRPr lang="en-IN"/>
           </a:p>
@@ -2225,7 +2241,7 @@
           <a:lstStyle/>
           <a:p>
             <a:r>
-              <a:rPr lang="en-US" smtClean="0"/>
+              <a:rPr lang="en-US"/>
               <a:t>Click to edit Master title style</a:t>
             </a:r>
             <a:endParaRPr lang="en-IN"/>
@@ -2249,7 +2265,7 @@
           <a:p>
             <a:fld id="{22B1BDCD-9193-4860-B347-94AD08F8FD51}" type="datetimeFigureOut">
               <a:rPr lang="en-IN" smtClean="0"/>
-              <a:t>04-07-2026</a:t>
+              <a:t>14-07-2026</a:t>
             </a:fld>
             <a:endParaRPr lang="en-IN"/>
           </a:p>
@@ -2344,7 +2360,7 @@
           <a:p>
             <a:fld id="{22B1BDCD-9193-4860-B347-94AD08F8FD51}" type="datetimeFigureOut">
               <a:rPr lang="en-IN" smtClean="0"/>
-              <a:t>04-07-2026</a:t>
+              <a:t>14-07-2026</a:t>
             </a:fld>
             <a:endParaRPr lang="en-IN"/>
           </a:p>
@@ -2447,7 +2463,7 @@
           </a:lstStyle>
           <a:p>
             <a:r>
-              <a:rPr lang="en-US" smtClean="0"/>
+              <a:rPr lang="en-US"/>
               <a:t>Click to edit Master title style</a:t>
             </a:r>
             <a:endParaRPr lang="en-IN"/>
@@ -2504,35 +2520,35 @@
           <a:p>
             <a:pPr lvl="0"/>
             <a:r>
-              <a:rPr lang="en-US" smtClean="0"/>
+              <a:rPr lang="en-US"/>
               <a:t>Click to edit Master text styles</a:t>
             </a:r>
           </a:p>
           <a:p>
             <a:pPr lvl="1"/>
             <a:r>
-              <a:rPr lang="en-US" smtClean="0"/>
+              <a:rPr lang="en-US"/>
               <a:t>Second level</a:t>
             </a:r>
           </a:p>
           <a:p>
             <a:pPr lvl="2"/>
             <a:r>
-              <a:rPr lang="en-US" smtClean="0"/>
+              <a:rPr lang="en-US"/>
               <a:t>Third level</a:t>
             </a:r>
           </a:p>
           <a:p>
             <a:pPr lvl="3"/>
             <a:r>
-              <a:rPr lang="en-US" smtClean="0"/>
+              <a:rPr lang="en-US"/>
               <a:t>Fourth level</a:t>
             </a:r>
           </a:p>
           <a:p>
             <a:pPr lvl="4"/>
             <a:r>
-              <a:rPr lang="en-US" smtClean="0"/>
+              <a:rPr lang="en-US"/>
               <a:t>Fifth level</a:t>
             </a:r>
             <a:endParaRPr lang="en-IN"/>
@@ -2598,7 +2614,7 @@
           <a:p>
             <a:pPr lvl="0"/>
             <a:r>
-              <a:rPr lang="en-US" smtClean="0"/>
+              <a:rPr lang="en-US"/>
               <a:t>Click to edit Master text styles</a:t>
             </a:r>
           </a:p>
@@ -2621,7 +2637,7 @@
           <a:p>
             <a:fld id="{22B1BDCD-9193-4860-B347-94AD08F8FD51}" type="datetimeFigureOut">
               <a:rPr lang="en-IN" smtClean="0"/>
-              <a:t>04-07-2026</a:t>
+              <a:t>14-07-2026</a:t>
             </a:fld>
             <a:endParaRPr lang="en-IN"/>
           </a:p>
@@ -2724,7 +2740,7 @@
           </a:lstStyle>
           <a:p>
             <a:r>
-              <a:rPr lang="en-US" smtClean="0"/>
+              <a:rPr lang="en-US"/>
               <a:t>Click to edit Master title style</a:t>
             </a:r>
             <a:endParaRPr lang="en-IN"/>
@@ -2851,7 +2867,7 @@
           <a:p>
             <a:pPr lvl="0"/>
             <a:r>
-              <a:rPr lang="en-US" smtClean="0"/>
+              <a:rPr lang="en-US"/>
               <a:t>Click to edit Master text styles</a:t>
             </a:r>
           </a:p>
@@ -2874,7 +2890,7 @@
           <a:p>
             <a:fld id="{22B1BDCD-9193-4860-B347-94AD08F8FD51}" type="datetimeFigureOut">
               <a:rPr lang="en-IN" smtClean="0"/>
-              <a:t>04-07-2026</a:t>
+              <a:t>14-07-2026</a:t>
             </a:fld>
             <a:endParaRPr lang="en-IN"/>
           </a:p>
@@ -2983,7 +2999,7 @@
           <a:lstStyle/>
           <a:p>
             <a:r>
-              <a:rPr lang="en-US" smtClean="0"/>
+              <a:rPr lang="en-US"/>
               <a:t>Click to edit Master title style</a:t>
             </a:r>
             <a:endParaRPr lang="en-IN"/>
@@ -3017,35 +3033,35 @@
           <a:p>
             <a:pPr lvl="0"/>
             <a:r>
-              <a:rPr lang="en-US" smtClean="0"/>
+              <a:rPr lang="en-US"/>
               <a:t>Click to edit Master text styles</a:t>
             </a:r>
           </a:p>
           <a:p>
             <a:pPr lvl="1"/>
             <a:r>
-              <a:rPr lang="en-US" smtClean="0"/>
+              <a:rPr lang="en-US"/>
               <a:t>Second level</a:t>
             </a:r>
           </a:p>
           <a:p>
             <a:pPr lvl="2"/>
             <a:r>
-              <a:rPr lang="en-US" smtClean="0"/>
+              <a:rPr lang="en-US"/>
               <a:t>Third level</a:t>
             </a:r>
           </a:p>
           <a:p>
             <a:pPr lvl="3"/>
             <a:r>
-              <a:rPr lang="en-US" smtClean="0"/>
+              <a:rPr lang="en-US"/>
               <a:t>Fourth level</a:t>
             </a:r>
           </a:p>
           <a:p>
             <a:pPr lvl="4"/>
             <a:r>
-              <a:rPr lang="en-US" smtClean="0"/>
+              <a:rPr lang="en-US"/>
               <a:t>Fifth level</a:t>
             </a:r>
             <a:endParaRPr lang="en-IN"/>
@@ -3087,7 +3103,7 @@
           <a:p>
             <a:fld id="{22B1BDCD-9193-4860-B347-94AD08F8FD51}" type="datetimeFigureOut">
               <a:rPr lang="en-IN" smtClean="0"/>
-              <a:t>04-07-2026</a:t>
+              <a:t>14-07-2026</a:t>
             </a:fld>
             <a:endParaRPr lang="en-IN"/>
           </a:p>
@@ -3534,41 +3550,11 @@
                   </a:schemeClr>
                 </a:solidFill>
               </a:rPr>
-              <a:t>Machine </a:t>
-            </a:r>
-            <a:r>
-              <a:rPr lang="en-US" sz="2400" dirty="0" smtClean="0">
-                <a:solidFill>
-                  <a:schemeClr val="tx2">
-                    <a:lumMod val="75000"/>
-                  </a:schemeClr>
-                </a:solidFill>
-              </a:rPr>
-              <a:t>Learning for </a:t>
-            </a:r>
-            <a:r>
-              <a:rPr lang="en-US" sz="2400" dirty="0">
-                <a:solidFill>
-                  <a:schemeClr val="tx2">
-                    <a:lumMod val="75000"/>
-                  </a:schemeClr>
-                </a:solidFill>
-              </a:rPr>
-              <a:t>Smartphone Price </a:t>
-            </a:r>
-            <a:r>
-              <a:rPr lang="en-US" sz="2400" dirty="0" smtClean="0">
-                <a:solidFill>
-                  <a:schemeClr val="tx2">
-                    <a:lumMod val="75000"/>
-                  </a:schemeClr>
-                </a:solidFill>
-              </a:rPr>
-              <a:t>Prediction</a:t>
-            </a:r>
-          </a:p>
-          <a:p>
-            <a:endParaRPr lang="en-US" sz="2400" dirty="0" smtClean="0">
+              <a:t>Machine Learning for Smartphone Price Prediction</a:t>
+            </a:r>
+          </a:p>
+          <a:p>
+            <a:endParaRPr lang="en-US" sz="2400" dirty="0">
               <a:solidFill>
                 <a:schemeClr val="tx2">
                   <a:lumMod val="75000"/>
@@ -3585,25 +3571,8 @@
                   </a:schemeClr>
                 </a:solidFill>
               </a:rPr>
-              <a:t>Project </a:t>
-            </a:r>
-            <a:r>
-              <a:rPr lang="en-IN" sz="1600" b="1" dirty="0" smtClean="0">
-                <a:solidFill>
-                  <a:schemeClr val="tx2">
-                    <a:lumMod val="75000"/>
-                  </a:schemeClr>
-                </a:solidFill>
-              </a:rPr>
-              <a:t>4 - Industry Dataset Analysis</a:t>
-            </a:r>
-            <a:endParaRPr lang="en-IN" sz="1600" b="1" dirty="0">
-              <a:solidFill>
-                <a:schemeClr val="tx2">
-                  <a:lumMod val="75000"/>
-                </a:schemeClr>
-              </a:solidFill>
-            </a:endParaRPr>
+              <a:t>Project 4 - Industry Dataset Analysis</a:t>
+            </a:r>
           </a:p>
         </p:txBody>
       </p:sp>
@@ -3713,18 +3682,10 @@
                   </a:schemeClr>
                 </a:solidFill>
               </a:rPr>
-              <a:t>Presented By</a:t>
-            </a:r>
-            <a:r>
-              <a:rPr lang="en-US" sz="1700" dirty="0" smtClean="0">
-                <a:solidFill>
-                  <a:schemeClr val="tx2">
-                    <a:lumMod val="75000"/>
-                  </a:schemeClr>
-                </a:solidFill>
-              </a:rPr>
-              <a:t>:			      </a:t>
-            </a:r>
+              <a:t>Presented By:			                    Data Analytics </a:t>
+            </a:r>
+          </a:p>
+          <a:p>
             <a:r>
               <a:rPr lang="en-US" sz="1700" dirty="0">
                 <a:solidFill>
@@ -3733,18 +3694,10 @@
                   </a:schemeClr>
                 </a:solidFill>
               </a:rPr>
-              <a:t> </a:t>
-            </a:r>
-            <a:r>
-              <a:rPr lang="en-US" sz="1700" dirty="0" smtClean="0">
-                <a:solidFill>
-                  <a:schemeClr val="tx2">
-                    <a:lumMod val="75000"/>
-                  </a:schemeClr>
-                </a:solidFill>
-              </a:rPr>
-              <a:t>             Data </a:t>
-            </a:r>
+              <a:t>Bhawna Chouhan			                    Internship Project NextHikes</a:t>
+            </a:r>
+          </a:p>
+          <a:p>
             <a:r>
               <a:rPr lang="en-US" sz="1700" dirty="0">
                 <a:solidFill>
@@ -3753,53 +3706,8 @@
                   </a:schemeClr>
                 </a:solidFill>
               </a:rPr>
-              <a:t>Analytics </a:t>
-            </a:r>
-            <a:endParaRPr lang="en-US" sz="1700" dirty="0" smtClean="0">
-              <a:solidFill>
-                <a:schemeClr val="tx2">
-                  <a:lumMod val="75000"/>
-                </a:schemeClr>
-              </a:solidFill>
-            </a:endParaRPr>
-          </a:p>
-          <a:p>
-            <a:r>
-              <a:rPr lang="en-US" sz="1700" dirty="0" smtClean="0">
-                <a:solidFill>
-                  <a:schemeClr val="tx2">
-                    <a:lumMod val="75000"/>
-                  </a:schemeClr>
-                </a:solidFill>
-              </a:rPr>
-              <a:t>Bhawna Chouhan			                    Internship Project NextHikes</a:t>
-            </a:r>
-            <a:endParaRPr lang="en-US" sz="1700" dirty="0">
-              <a:solidFill>
-                <a:schemeClr val="tx2">
-                  <a:lumMod val="75000"/>
-                </a:schemeClr>
-              </a:solidFill>
-            </a:endParaRPr>
-          </a:p>
-          <a:p>
-            <a:r>
-              <a:rPr lang="en-US" sz="1700" dirty="0" smtClean="0">
-                <a:solidFill>
-                  <a:schemeClr val="tx2">
-                    <a:lumMod val="75000"/>
-                  </a:schemeClr>
-                </a:solidFill>
-              </a:rPr>
               <a:t>				                    July 2026	</a:t>
             </a:r>
-            <a:endParaRPr lang="en-US" sz="1700" dirty="0">
-              <a:solidFill>
-                <a:schemeClr val="tx2">
-                  <a:lumMod val="75000"/>
-                </a:schemeClr>
-              </a:solidFill>
-            </a:endParaRPr>
           </a:p>
         </p:txBody>
       </p:sp>
@@ -3888,19 +3796,15 @@
             <a:pPr marL="0" indent="0">
               <a:buNone/>
             </a:pPr>
-            <a:endParaRPr lang="en-US" sz="1800" b="1" dirty="0" smtClean="0"/>
+            <a:endParaRPr lang="en-US" sz="1800" b="1" dirty="0"/>
           </a:p>
           <a:p>
             <a:pPr marL="0" indent="0">
               <a:buNone/>
             </a:pPr>
             <a:r>
-              <a:rPr lang="en-US" sz="1800" b="1" dirty="0" smtClean="0"/>
-              <a:t>Model </a:t>
-            </a:r>
-            <a:r>
               <a:rPr lang="en-US" sz="1800" b="1" dirty="0"/>
-              <a:t>Building Process</a:t>
+              <a:t>Model Building Process</a:t>
             </a:r>
           </a:p>
           <a:p>
@@ -3978,7 +3882,6 @@
               <a:rPr lang="en-US" sz="1600" dirty="0"/>
               <a:t>Evaluated both models using unseen test data to measure </a:t>
             </a:r>
-            <a:endParaRPr lang="en-US" sz="1600" dirty="0" smtClean="0"/>
           </a:p>
           <a:p>
             <a:pPr marL="0" indent="0">
@@ -3989,17 +3892,8 @@
             </a:pPr>
             <a:r>
               <a:rPr lang="en-US" sz="1600" dirty="0"/>
-              <a:t> </a:t>
-            </a:r>
-            <a:r>
-              <a:rPr lang="en-US" sz="1600" dirty="0" smtClean="0"/>
-              <a:t>       prediction </a:t>
-            </a:r>
-            <a:r>
-              <a:rPr lang="en-US" sz="1600" dirty="0"/>
-              <a:t>accuracy.</a:t>
-            </a:r>
-            <a:endParaRPr lang="en-US" sz="1600" dirty="0"/>
+              <a:t>        prediction accuracy.</a:t>
+            </a:r>
           </a:p>
           <a:p>
             <a:pPr marL="0" indent="0">
@@ -4010,26 +3904,18 @@
               <a:t>Models </a:t>
             </a:r>
             <a:r>
-              <a:rPr lang="en-IN" sz="1800" b="1" dirty="0" smtClean="0"/>
+              <a:rPr lang="en-IN" sz="1800" b="1" dirty="0"/>
               <a:t>Implemented</a:t>
             </a:r>
           </a:p>
           <a:p>
             <a:r>
-              <a:rPr lang="en-US" sz="1600" b="1" dirty="0" smtClean="0"/>
-              <a:t>Linear </a:t>
-            </a:r>
-            <a:r>
               <a:rPr lang="en-US" sz="1600" b="1" dirty="0"/>
-              <a:t>Regression</a:t>
+              <a:t>Linear Regression</a:t>
             </a:r>
             <a:r>
               <a:rPr lang="en-US" sz="1600" dirty="0"/>
-              <a:t> </a:t>
-            </a:r>
-            <a:r>
-              <a:rPr lang="en-US" sz="1600" dirty="0" smtClean="0"/>
-              <a:t> :</a:t>
+              <a:t>  :</a:t>
             </a:r>
           </a:p>
           <a:p>
@@ -4041,19 +3927,7 @@
             </a:pPr>
             <a:r>
               <a:rPr lang="en-US" sz="1600" dirty="0"/>
-              <a:t>	</a:t>
-            </a:r>
-            <a:r>
-              <a:rPr lang="en-US" sz="1600" dirty="0" smtClean="0"/>
-              <a:t> </a:t>
-            </a:r>
-            <a:r>
-              <a:rPr lang="en-US" sz="1600" dirty="0"/>
-              <a:t>Baseline model for price prediction</a:t>
-            </a:r>
-            <a:r>
-              <a:rPr lang="en-US" sz="1600" dirty="0" smtClean="0"/>
-              <a:t>.</a:t>
+              <a:t>	 Baseline model for price prediction.</a:t>
             </a:r>
           </a:p>
           <a:p>
@@ -4063,20 +3937,12 @@
               </a:lnSpc>
             </a:pPr>
             <a:r>
-              <a:rPr lang="en-US" sz="1600" b="1" dirty="0" smtClean="0"/>
-              <a:t>Random </a:t>
-            </a:r>
-            <a:r>
               <a:rPr lang="en-US" sz="1600" b="1" dirty="0"/>
-              <a:t>Forest Regression</a:t>
+              <a:t>Random Forest Regression</a:t>
             </a:r>
             <a:r>
               <a:rPr lang="en-US" sz="1600" dirty="0"/>
-              <a:t> </a:t>
-            </a:r>
-            <a:r>
-              <a:rPr lang="en-US" sz="1600" dirty="0" smtClean="0"/>
-              <a:t> :</a:t>
+              <a:t>  :</a:t>
             </a:r>
           </a:p>
           <a:p>
@@ -4088,15 +3954,7 @@
             </a:pPr>
             <a:r>
               <a:rPr lang="en-US" sz="1600" dirty="0"/>
-              <a:t>	</a:t>
-            </a:r>
-            <a:r>
-              <a:rPr lang="en-US" sz="1600" dirty="0" smtClean="0"/>
-              <a:t> </a:t>
-            </a:r>
-            <a:r>
-              <a:rPr lang="en-US" sz="1600" dirty="0"/>
-              <a:t>Ensemble model that captures complex, non-linear relationships.</a:t>
+              <a:t>	 Ensemble model that captures complex, non-linear relationships.</a:t>
             </a:r>
             <a:endParaRPr lang="en-IN" sz="1600" dirty="0"/>
           </a:p>
@@ -4171,7 +4029,7 @@
           <a:lstStyle/>
           <a:p>
             <a:r>
-              <a:rPr lang="en-IN" b="1" dirty="0" smtClean="0"/>
+              <a:rPr lang="en-IN" b="1" dirty="0"/>
               <a:t>Workflow :</a:t>
             </a:r>
           </a:p>
@@ -4180,12 +4038,8 @@
           </a:p>
           <a:p>
             <a:r>
-              <a:rPr lang="en-IN" dirty="0" smtClean="0"/>
-              <a:t>Prepared </a:t>
-            </a:r>
-            <a:r>
               <a:rPr lang="en-IN" dirty="0"/>
-              <a:t>Dataset</a:t>
+              <a:t>Prepared Dataset</a:t>
             </a:r>
           </a:p>
           <a:p>
@@ -4345,13 +4199,8 @@
             <a:pPr algn="l"/>
             <a:r>
               <a:rPr lang="en-IN" sz="3600" b="1" dirty="0"/>
-              <a:t>Model Evaluation &amp; </a:t>
-            </a:r>
-            <a:r>
-              <a:rPr lang="en-IN" sz="3600" b="1" dirty="0" smtClean="0"/>
-              <a:t>Performance Comparison</a:t>
-            </a:r>
-            <a:endParaRPr lang="en-IN" sz="3600" b="1" dirty="0"/>
+              <a:t>Model Evaluation &amp; Performance Comparison</a:t>
+            </a:r>
           </a:p>
         </p:txBody>
       </p:sp>
@@ -4373,7 +4222,7 @@
         </p:spPr>
         <p:txBody>
           <a:bodyPr>
-            <a:normAutofit lnSpcReduction="10000"/>
+            <a:normAutofit fontScale="92500" lnSpcReduction="10000"/>
           </a:bodyPr>
           <a:lstStyle/>
           <a:p>
@@ -4382,11 +4231,7 @@
             </a:pPr>
             <a:r>
               <a:rPr lang="en-IN" sz="1800" b="1" dirty="0"/>
-              <a:t>Key </a:t>
-            </a:r>
-            <a:r>
-              <a:rPr lang="en-IN" sz="1800" b="1" dirty="0" smtClean="0"/>
-              <a:t>Findings </a:t>
+              <a:t>Key Findings </a:t>
             </a:r>
           </a:p>
           <a:p>
@@ -4411,7 +4256,6 @@
               <a:rPr lang="en-US" sz="1600" dirty="0"/>
               <a:t>across all evaluation metrics. </a:t>
             </a:r>
-            <a:endParaRPr lang="en-US" sz="1600" dirty="0" smtClean="0"/>
           </a:p>
           <a:p>
             <a:pPr>
@@ -4420,12 +4264,8 @@
               </a:lnSpc>
             </a:pPr>
             <a:r>
-              <a:rPr lang="en-US" sz="1600" b="1" dirty="0" smtClean="0"/>
-              <a:t>MAE</a:t>
-            </a:r>
-            <a:r>
               <a:rPr lang="en-US" sz="1600" b="1" dirty="0"/>
-              <a:t>, MSE</a:t>
+              <a:t>MAE, MSE</a:t>
             </a:r>
             <a:r>
               <a:rPr lang="en-US" sz="1600" dirty="0"/>
@@ -4437,11 +4277,7 @@
             </a:r>
             <a:r>
               <a:rPr lang="en-US" sz="1600" dirty="0"/>
-              <a:t>were significantly lower, indicating more accurate price predictions</a:t>
-            </a:r>
-            <a:r>
-              <a:rPr lang="en-US" sz="1600" dirty="0" smtClean="0"/>
-              <a:t>.</a:t>
+              <a:t>were significantly lower, indicating more accurate price predictions.</a:t>
             </a:r>
           </a:p>
           <a:p>
@@ -4451,30 +4287,17 @@
               </a:lnSpc>
             </a:pPr>
             <a:r>
-              <a:rPr lang="en-US" sz="1600" dirty="0" smtClean="0"/>
-              <a:t> </a:t>
-            </a:r>
-            <a:r>
-              <a:rPr lang="en-US" sz="1600" dirty="0"/>
-              <a:t>The </a:t>
-            </a:r>
-            <a:r>
-              <a:rPr lang="en-US" sz="1600" b="1" dirty="0"/>
-              <a:t>R²</a:t>
-            </a:r>
-            <a:r>
               <a:rPr lang="en-US" sz="1600" dirty="0"/>
               <a:t> </a:t>
             </a:r>
             <a:r>
-              <a:rPr lang="en-US" sz="1600" b="1" dirty="0"/>
-              <a:t>Score</a:t>
+              <a:rPr lang="en-IN" sz="1600" dirty="0"/>
+              <a:t>Random Forest improved the R² Score from 0.25 (Linear Regression) to 0.54 while reducing MAE, MSE, and RMSE</a:t>
             </a:r>
             <a:r>
               <a:rPr lang="en-US" sz="1600" dirty="0"/>
-              <a:t> increased from 0.25 to 0.54, demonstrating better predictive performance. </a:t>
-            </a:r>
-            <a:endParaRPr lang="en-US" sz="1600" dirty="0" smtClean="0"/>
+              <a:t>, demonstrating better predictive performance. </a:t>
+            </a:r>
           </a:p>
           <a:p>
             <a:pPr>
@@ -4483,39 +4306,34 @@
               </a:lnSpc>
             </a:pPr>
             <a:r>
-              <a:rPr lang="en-US" sz="1600" b="1" dirty="0" smtClean="0"/>
-              <a:t>Random </a:t>
-            </a:r>
-            <a:r>
               <a:rPr lang="en-US" sz="1600" b="1" dirty="0"/>
-              <a:t>Forest </a:t>
+              <a:t>Random Forest </a:t>
             </a:r>
             <a:r>
               <a:rPr lang="en-US" sz="1600" dirty="0"/>
-              <a:t>captured complex, non-linear relationships between smartphone features more effectively</a:t>
-            </a:r>
-            <a:r>
-              <a:rPr lang="en-US" sz="1600" dirty="0" smtClean="0"/>
-              <a:t>.</a:t>
+              <a:t>captured complex, non-linear relationships between smartphone features more effectively.</a:t>
             </a:r>
           </a:p>
           <a:p>
             <a:endParaRPr lang="en-US" sz="1800" dirty="0"/>
           </a:p>
           <a:p>
-            <a:endParaRPr lang="en-US" sz="1800" dirty="0" smtClean="0"/>
-          </a:p>
-          <a:p>
             <a:endParaRPr lang="en-US" sz="1800" dirty="0"/>
           </a:p>
           <a:p>
-            <a:endParaRPr lang="en-US" sz="1800" dirty="0" smtClean="0"/>
-          </a:p>
-          <a:p>
             <a:endParaRPr lang="en-US" sz="1800" dirty="0"/>
           </a:p>
           <a:p>
-            <a:endParaRPr lang="en-US" sz="1800" dirty="0" smtClean="0"/>
+            <a:endParaRPr lang="en-US" sz="1800" dirty="0"/>
+          </a:p>
+          <a:p>
+            <a:endParaRPr lang="en-US" sz="1800" dirty="0"/>
+          </a:p>
+          <a:p>
+            <a:r>
+              <a:rPr lang="en-US" sz="1800" dirty="0"/>
+              <a:t>*</a:t>
+            </a:r>
           </a:p>
           <a:p>
             <a:pPr marL="0" indent="0">
@@ -4610,7 +4428,7 @@
         </p:blipFill>
         <p:spPr>
           <a:xfrm>
-            <a:off x="2555776" y="3429000"/>
+            <a:off x="2051720" y="3514100"/>
             <a:ext cx="6017995" cy="1715100"/>
           </a:xfrm>
           <a:prstGeom prst="rect">
@@ -4626,7 +4444,7 @@
         </p:nvSpPr>
         <p:spPr>
           <a:xfrm>
-            <a:off x="3707905" y="5229200"/>
+            <a:off x="3353038" y="5301208"/>
             <a:ext cx="3672407" cy="648072"/>
           </a:xfrm>
           <a:prstGeom prst="roundRect">
@@ -4662,10 +4480,6 @@
             <a:r>
               <a:rPr lang="en-US" b="1" dirty="0"/>
               <a:t>Best Model Selected</a:t>
-            </a:r>
-            <a:r>
-              <a:rPr lang="en-US" dirty="0"/>
-              <a:t/>
             </a:r>
             <a:br>
               <a:rPr lang="en-US" dirty="0"/>
@@ -4836,36 +4650,32 @@
             </a:r>
             <a:r>
               <a:rPr lang="en-US" sz="1600" dirty="0"/>
-              <a:t> had minimal influence</a:t>
-            </a:r>
-            <a:r>
-              <a:rPr lang="en-US" sz="1600" dirty="0" smtClean="0"/>
-              <a:t>.</a:t>
+              <a:t> had minimal influence.</a:t>
             </a:r>
           </a:p>
           <a:p>
             <a:endParaRPr lang="en-US" sz="1600" dirty="0"/>
           </a:p>
           <a:p>
-            <a:endParaRPr lang="en-US" sz="1600" dirty="0" smtClean="0"/>
-          </a:p>
-          <a:p>
             <a:endParaRPr lang="en-US" sz="1600" dirty="0"/>
           </a:p>
           <a:p>
-            <a:endParaRPr lang="en-US" sz="1600" dirty="0" smtClean="0"/>
-          </a:p>
-          <a:p>
             <a:endParaRPr lang="en-US" sz="1600" dirty="0"/>
           </a:p>
           <a:p>
-            <a:endParaRPr lang="en-US" sz="1600" dirty="0" smtClean="0"/>
-          </a:p>
-          <a:p>
             <a:endParaRPr lang="en-US" sz="1600" dirty="0"/>
           </a:p>
           <a:p>
-            <a:endParaRPr lang="en-US" sz="1600" dirty="0" smtClean="0"/>
+            <a:endParaRPr lang="en-US" sz="1600" dirty="0"/>
+          </a:p>
+          <a:p>
+            <a:endParaRPr lang="en-US" sz="1600" dirty="0"/>
+          </a:p>
+          <a:p>
+            <a:endParaRPr lang="en-US" sz="1600" dirty="0"/>
+          </a:p>
+          <a:p>
+            <a:endParaRPr lang="en-US" sz="1600" dirty="0"/>
           </a:p>
           <a:p>
             <a:pPr marL="0" indent="0">
@@ -5074,7 +4884,7 @@
               </a:lnSpc>
             </a:pPr>
             <a:r>
-              <a:rPr lang="en-US" sz="1600" dirty="0" smtClean="0"/>
+              <a:rPr lang="en-US" sz="1600" dirty="0"/>
               <a:t>Improve </a:t>
             </a:r>
             <a:r>
@@ -5285,7 +5095,7 @@
           <a:lstStyle/>
           <a:p>
             <a:r>
-              <a:rPr lang="en-US" b="1" dirty="0" smtClean="0"/>
+              <a:rPr lang="en-US" b="1" dirty="0"/>
               <a:t>Workflow :</a:t>
             </a:r>
           </a:p>
@@ -5294,12 +5104,8 @@
           </a:p>
           <a:p>
             <a:r>
-              <a:rPr lang="en-US" dirty="0" smtClean="0"/>
-              <a:t>Feature </a:t>
-            </a:r>
-            <a:r>
               <a:rPr lang="en-US" dirty="0"/>
-              <a:t>Analysis</a:t>
+              <a:t>Feature Analysis</a:t>
             </a:r>
           </a:p>
           <a:p>
@@ -5826,7 +5632,7 @@
               <a:buNone/>
             </a:pPr>
             <a:r>
-              <a:rPr lang="en-IN" sz="4000" b="1" dirty="0" smtClean="0"/>
+              <a:rPr lang="en-IN" sz="4000" b="1" dirty="0"/>
               <a:t>        	    </a:t>
             </a:r>
           </a:p>
@@ -5836,31 +5642,22 @@
             </a:pPr>
             <a:r>
               <a:rPr lang="en-IN" sz="4000" b="1" dirty="0"/>
-              <a:t>	</a:t>
-            </a:r>
-            <a:r>
-              <a:rPr lang="en-IN" sz="4000" b="1" dirty="0" smtClean="0"/>
-              <a:t>	</a:t>
-            </a:r>
-            <a:r>
-              <a:rPr lang="en-IN" sz="5400" b="1" dirty="0" smtClean="0"/>
-              <a:t>THANK </a:t>
+              <a:t>		</a:t>
             </a:r>
             <a:r>
               <a:rPr lang="en-IN" sz="5400" b="1" dirty="0"/>
-              <a:t>YOU!  </a:t>
-            </a:r>
-            <a:endParaRPr lang="en-IN" sz="5400" b="1" dirty="0" smtClean="0"/>
+              <a:t>THANK YOU!  </a:t>
+            </a:r>
           </a:p>
           <a:p>
             <a:pPr marL="0" indent="0">
               <a:buNone/>
             </a:pPr>
             <a:r>
-              <a:rPr lang="en-IN" sz="4000" b="1" dirty="0" smtClean="0"/>
+              <a:rPr lang="en-IN" sz="4000" b="1" dirty="0"/>
               <a:t>                                                           </a:t>
             </a:r>
-            <a:endParaRPr lang="en-IN" dirty="0" smtClean="0"/>
+            <a:endParaRPr lang="en-IN" dirty="0"/>
           </a:p>
           <a:p>
             <a:pPr marL="0" indent="0">
@@ -5873,33 +5670,24 @@
               <a:buNone/>
             </a:pPr>
             <a:r>
-              <a:rPr lang="en-IN" dirty="0" smtClean="0"/>
+              <a:rPr lang="en-IN" dirty="0"/>
               <a:t>           	</a:t>
             </a:r>
             <a:r>
               <a:rPr lang="en-IN" b="1" dirty="0"/>
-              <a:t> </a:t>
-            </a:r>
-            <a:r>
-              <a:rPr lang="en-IN" b="1" dirty="0" smtClean="0"/>
-              <a:t>    Bhawna </a:t>
-            </a:r>
-            <a:r>
-              <a:rPr lang="en-IN" b="1" dirty="0"/>
-              <a:t>Chouhan</a:t>
+              <a:t>     Bhawna Chouhan</a:t>
             </a:r>
             <a:r>
               <a:rPr lang="en-IN" dirty="0"/>
               <a:t> </a:t>
             </a:r>
-            <a:endParaRPr lang="en-IN" dirty="0" smtClean="0"/>
           </a:p>
           <a:p>
             <a:pPr marL="0" indent="0">
               <a:buNone/>
             </a:pPr>
             <a:r>
-              <a:rPr lang="en-IN" dirty="0" smtClean="0"/>
+              <a:rPr lang="en-IN" dirty="0"/>
               <a:t>                </a:t>
             </a:r>
           </a:p>
@@ -5909,26 +5697,17 @@
             </a:pPr>
             <a:r>
               <a:rPr lang="en-IN" dirty="0"/>
-              <a:t> </a:t>
-            </a:r>
-            <a:r>
-              <a:rPr lang="en-IN" dirty="0" smtClean="0"/>
-              <a:t>           </a:t>
-            </a:r>
+              <a:t>            Data Analytics Internship Project      </a:t>
+            </a:r>
+          </a:p>
+          <a:p>
+            <a:pPr marL="0" indent="0">
+              <a:buNone/>
+            </a:pPr>
             <a:r>
               <a:rPr lang="en-IN" dirty="0"/>
-              <a:t>Data Analytics Internship Project      </a:t>
-            </a:r>
-          </a:p>
-          <a:p>
-            <a:pPr marL="0" indent="0">
-              <a:buNone/>
-            </a:pPr>
-            <a:r>
-              <a:rPr lang="en-IN" dirty="0" smtClean="0"/>
               <a:t>                              NextHikes                   </a:t>
             </a:r>
-            <a:endParaRPr lang="en-IN" dirty="0"/>
           </a:p>
         </p:txBody>
       </p:sp>
@@ -5986,7 +5765,7 @@
           <a:p>
             <a:pPr algn="l"/>
             <a:r>
-              <a:rPr lang="en-US" sz="3600" b="1" dirty="0" smtClean="0"/>
+              <a:rPr lang="en-US" sz="3600" b="1" dirty="0"/>
               <a:t>Project Overview</a:t>
             </a:r>
             <a:endParaRPr lang="en-IN" sz="3600" b="1" dirty="0"/>
@@ -6020,13 +5799,8 @@
             </a:pPr>
             <a:r>
               <a:rPr lang="en-US" sz="1800" b="1" dirty="0"/>
-              <a:t>Project </a:t>
-            </a:r>
-            <a:r>
-              <a:rPr lang="en-US" sz="1800" b="1" dirty="0" smtClean="0"/>
-              <a:t>Summary</a:t>
-            </a:r>
-            <a:endParaRPr lang="en-US" sz="1800" b="1" dirty="0"/>
+              <a:t>Project Summary</a:t>
+            </a:r>
           </a:p>
           <a:p>
             <a:pPr>
@@ -6038,7 +5812,6 @@
               <a:rPr lang="en-US" sz="1600" dirty="0"/>
               <a:t>Predict smartphone prices using Machine Learning. </a:t>
             </a:r>
-            <a:endParaRPr lang="en-US" sz="1600" dirty="0" smtClean="0"/>
           </a:p>
           <a:p>
             <a:pPr>
@@ -6047,14 +5820,9 @@
               </a:lnSpc>
             </a:pPr>
             <a:r>
-              <a:rPr lang="en-US" sz="1600" dirty="0" smtClean="0"/>
-              <a:t>Identify </a:t>
-            </a:r>
-            <a:r>
               <a:rPr lang="en-US" sz="1600" dirty="0"/>
-              <a:t>the most influential smartphone features. </a:t>
-            </a:r>
-            <a:endParaRPr lang="en-US" sz="1600" dirty="0" smtClean="0"/>
+              <a:t>Identify the most influential smartphone features. </a:t>
+            </a:r>
           </a:p>
           <a:p>
             <a:pPr>
@@ -6063,14 +5831,9 @@
               </a:lnSpc>
             </a:pPr>
             <a:r>
-              <a:rPr lang="en-US" sz="1600" dirty="0" smtClean="0"/>
-              <a:t>Compare </a:t>
-            </a:r>
-            <a:r>
               <a:rPr lang="en-US" sz="1600" dirty="0"/>
-              <a:t>Linear Regression and Random Forest models. </a:t>
-            </a:r>
-            <a:endParaRPr lang="en-US" sz="1600" dirty="0" smtClean="0"/>
+              <a:t>Compare Linear Regression and Random Forest models. </a:t>
+            </a:r>
           </a:p>
           <a:p>
             <a:pPr>
@@ -6079,26 +5842,21 @@
               </a:lnSpc>
             </a:pPr>
             <a:r>
-              <a:rPr lang="en-US" sz="1600" dirty="0" smtClean="0"/>
-              <a:t>Provide </a:t>
-            </a:r>
-            <a:r>
               <a:rPr lang="en-US" sz="1600" dirty="0"/>
-              <a:t>business recommendations for pricing strategy.</a:t>
-            </a:r>
-          </a:p>
-          <a:p>
-            <a:endParaRPr lang="en-US" sz="1800" dirty="0" smtClean="0"/>
+              <a:t>Provide business recommendations for pricing strategy.</a:t>
+            </a:r>
+          </a:p>
+          <a:p>
+            <a:endParaRPr lang="en-US" sz="1800" dirty="0"/>
           </a:p>
           <a:p>
             <a:pPr marL="0" indent="0">
               <a:buNone/>
             </a:pPr>
             <a:r>
-              <a:rPr lang="en-IN" sz="1800" dirty="0" smtClean="0"/>
+              <a:rPr lang="en-IN" sz="1800" dirty="0"/>
               <a:t>	</a:t>
             </a:r>
-            <a:endParaRPr lang="en-IN" sz="1800" dirty="0"/>
           </a:p>
         </p:txBody>
       </p:sp>
@@ -6181,7 +5939,7 @@
               <a:t>Project Workflow </a:t>
             </a:r>
             <a:r>
-              <a:rPr lang="en-US" b="1" dirty="0" smtClean="0"/>
+              <a:rPr lang="en-US" b="1" dirty="0"/>
               <a:t>:</a:t>
             </a:r>
           </a:p>
@@ -6190,12 +5948,8 @@
           </a:p>
           <a:p>
             <a:r>
-              <a:rPr lang="en-US" dirty="0" smtClean="0"/>
-              <a:t>1. Data </a:t>
-            </a:r>
-            <a:r>
               <a:rPr lang="en-US" dirty="0"/>
-              <a:t>Collection</a:t>
+              <a:t>1. Data Collection</a:t>
             </a:r>
           </a:p>
           <a:p>
@@ -6206,12 +5960,8 @@
           </a:p>
           <a:p>
             <a:r>
-              <a:rPr lang="en-US" dirty="0" smtClean="0"/>
-              <a:t>2. Data </a:t>
-            </a:r>
-            <a:r>
               <a:rPr lang="en-US" dirty="0"/>
-              <a:t>Preprocessing</a:t>
+              <a:t>2. Data Preprocessing</a:t>
             </a:r>
           </a:p>
           <a:p>
@@ -6222,12 +5972,8 @@
           </a:p>
           <a:p>
             <a:r>
-              <a:rPr lang="en-US" dirty="0" smtClean="0"/>
-              <a:t>3. Feature </a:t>
-            </a:r>
-            <a:r>
               <a:rPr lang="en-US" dirty="0"/>
-              <a:t>Engineering</a:t>
+              <a:t>3. Feature Engineering</a:t>
             </a:r>
           </a:p>
           <a:p>
@@ -6238,18 +5984,9 @@
           </a:p>
           <a:p>
             <a:r>
-              <a:rPr lang="en-US" dirty="0" smtClean="0"/>
-              <a:t>4. Exploratory </a:t>
-            </a:r>
-            <a:r>
               <a:rPr lang="en-US" dirty="0"/>
-              <a:t>Data </a:t>
-            </a:r>
-            <a:r>
-              <a:rPr lang="en-US" dirty="0" smtClean="0"/>
-              <a:t>Analysis</a:t>
-            </a:r>
-            <a:endParaRPr lang="en-US" dirty="0"/>
+              <a:t>4. Exploratory Data Analysis</a:t>
+            </a:r>
           </a:p>
           <a:p>
             <a:r>
@@ -6259,12 +5996,8 @@
           </a:p>
           <a:p>
             <a:r>
-              <a:rPr lang="en-US" dirty="0" smtClean="0"/>
-              <a:t>5. Model </a:t>
-            </a:r>
-            <a:r>
               <a:rPr lang="en-US" dirty="0"/>
-              <a:t>Development</a:t>
+              <a:t>5. Model Development</a:t>
             </a:r>
           </a:p>
           <a:p>
@@ -6275,12 +6008,8 @@
           </a:p>
           <a:p>
             <a:r>
-              <a:rPr lang="en-US" dirty="0" smtClean="0"/>
-              <a:t>6. Model </a:t>
-            </a:r>
-            <a:r>
               <a:rPr lang="en-US" dirty="0"/>
-              <a:t>Evaluation</a:t>
+              <a:t>6. Model Evaluation</a:t>
             </a:r>
           </a:p>
           <a:p>
@@ -6291,12 +6020,8 @@
           </a:p>
           <a:p>
             <a:r>
-              <a:rPr lang="en-US" dirty="0" smtClean="0"/>
-              <a:t>7. Feature </a:t>
-            </a:r>
-            <a:r>
               <a:rPr lang="en-US" dirty="0"/>
-              <a:t>Importance Analysis</a:t>
+              <a:t>7. Feature Importance Analysis</a:t>
             </a:r>
           </a:p>
           <a:p>
@@ -6307,12 +6032,8 @@
           </a:p>
           <a:p>
             <a:r>
-              <a:rPr lang="en-US" dirty="0" smtClean="0"/>
-              <a:t>8. Business </a:t>
-            </a:r>
-            <a:r>
               <a:rPr lang="en-US" dirty="0"/>
-              <a:t>Recommendations</a:t>
+              <a:t>8. Business Recommendations</a:t>
             </a:r>
             <a:endParaRPr lang="en-IN" dirty="0"/>
           </a:p>
@@ -6341,11 +6062,7 @@
           <a:p>
             <a:r>
               <a:rPr lang="en-IN" b="1" dirty="0"/>
-              <a:t>Dataset </a:t>
-            </a:r>
-            <a:r>
-              <a:rPr lang="en-IN" b="1" dirty="0" smtClean="0"/>
-              <a:t>Overview</a:t>
+              <a:t>Dataset Overview</a:t>
             </a:r>
           </a:p>
           <a:p>
@@ -6359,19 +6076,11 @@
             </a:pPr>
             <a:r>
               <a:rPr lang="en-IN" sz="1600" b="1" dirty="0"/>
-              <a:t>Dataset </a:t>
-            </a:r>
-            <a:r>
-              <a:rPr lang="en-IN" sz="1600" b="1" dirty="0" smtClean="0"/>
-              <a:t>Size       :</a:t>
-            </a:r>
-            <a:r>
-              <a:rPr lang="en-IN" sz="1600" dirty="0" smtClean="0"/>
-              <a:t>  531 </a:t>
+              <a:t>Dataset Size       :</a:t>
             </a:r>
             <a:r>
               <a:rPr lang="en-IN" sz="1600" dirty="0"/>
-              <a:t>Smartphone Records </a:t>
+              <a:t>  531 Smartphone Records </a:t>
             </a:r>
           </a:p>
           <a:p>
@@ -6382,17 +6091,12 @@
             </a:pPr>
             <a:r>
               <a:rPr lang="en-IN" sz="1600" b="1" dirty="0"/>
-              <a:t>Target </a:t>
-            </a:r>
-            <a:r>
-              <a:rPr lang="en-IN" sz="1600" b="1" dirty="0" smtClean="0"/>
-              <a:t>Variable  : </a:t>
-            </a:r>
-            <a:r>
-              <a:rPr lang="en-IN" sz="1600" dirty="0" smtClean="0"/>
+              <a:t>Target Variable  : </a:t>
+            </a:r>
+            <a:r>
+              <a:rPr lang="en-IN" sz="1600" dirty="0"/>
               <a:t> Prize  </a:t>
             </a:r>
-            <a:endParaRPr lang="en-IN" sz="1600" dirty="0"/>
           </a:p>
           <a:p>
             <a:pPr>
@@ -6402,19 +6106,11 @@
             </a:pPr>
             <a:r>
               <a:rPr lang="en-IN" sz="1600" b="1" dirty="0"/>
-              <a:t>Input </a:t>
-            </a:r>
-            <a:r>
-              <a:rPr lang="en-IN" sz="1600" b="1" dirty="0" smtClean="0"/>
-              <a:t>Features   : </a:t>
-            </a:r>
-            <a:r>
-              <a:rPr lang="en-IN" sz="1600" dirty="0" smtClean="0"/>
-              <a:t> </a:t>
+              <a:t>Input Features   : </a:t>
             </a:r>
             <a:r>
               <a:rPr lang="en-IN" sz="1600" dirty="0"/>
-              <a:t>14 Selected Features </a:t>
+              <a:t> 14 Selected Features </a:t>
             </a:r>
           </a:p>
           <a:p>
@@ -6425,21 +6121,12 @@
             </a:pPr>
             <a:r>
               <a:rPr lang="en-IN" sz="1600" b="1" dirty="0"/>
-              <a:t>Models </a:t>
-            </a:r>
-            <a:r>
-              <a:rPr lang="en-IN" sz="1600" b="1" dirty="0" smtClean="0"/>
-              <a:t>Used      :</a:t>
-            </a:r>
-            <a:r>
-              <a:rPr lang="en-IN" sz="1600" dirty="0" smtClean="0"/>
-              <a:t> </a:t>
+              <a:t>Models Used      :</a:t>
             </a:r>
             <a:r>
               <a:rPr lang="en-IN" sz="1600" dirty="0"/>
-              <a:t>Linear Regression &amp; </a:t>
-            </a:r>
-            <a:endParaRPr lang="en-IN" sz="1600" dirty="0" smtClean="0"/>
+              <a:t> Linear Regression &amp; </a:t>
+            </a:r>
           </a:p>
           <a:p>
             <a:pPr>
@@ -6449,15 +6136,7 @@
             </a:pPr>
             <a:r>
               <a:rPr lang="en-IN" sz="1600" dirty="0"/>
-              <a:t> </a:t>
-            </a:r>
-            <a:r>
-              <a:rPr lang="en-IN" sz="1600" dirty="0" smtClean="0"/>
-              <a:t>                               Random Forest </a:t>
-            </a:r>
-            <a:r>
-              <a:rPr lang="en-IN" sz="1600" dirty="0"/>
-              <a:t>Regression</a:t>
+              <a:t>                                Random Forest Regression</a:t>
             </a:r>
           </a:p>
         </p:txBody>
@@ -6551,7 +6230,7 @@
               <a:buNone/>
             </a:pPr>
             <a:r>
-              <a:rPr lang="en-US" sz="7200" b="1" dirty="0" smtClean="0"/>
+              <a:rPr lang="en-US" sz="7200" b="1" dirty="0"/>
               <a:t>Business Problem  </a:t>
             </a:r>
           </a:p>
@@ -6562,14 +6241,9 @@
               </a:lnSpc>
             </a:pPr>
             <a:r>
-              <a:rPr lang="en-US" sz="6400" dirty="0" smtClean="0"/>
-              <a:t>Smartphone </a:t>
-            </a:r>
-            <a:r>
               <a:rPr lang="en-US" sz="6400" dirty="0"/>
-              <a:t>prices depend on multiple hardware and software features.</a:t>
-            </a:r>
-            <a:endParaRPr lang="en-US" sz="6400" dirty="0" smtClean="0"/>
+              <a:t>Smartphone prices depend on multiple hardware and software features.</a:t>
+            </a:r>
           </a:p>
           <a:p>
             <a:pPr>
@@ -6578,7 +6252,7 @@
               </a:lnSpc>
             </a:pPr>
             <a:r>
-              <a:rPr lang="en-US" sz="6400" dirty="0" smtClean="0"/>
+              <a:rPr lang="en-US" sz="6400" dirty="0"/>
               <a:t> Manually estimating the correct price is difficult because many features interact simultaneously. </a:t>
             </a:r>
           </a:p>
@@ -6589,12 +6263,8 @@
               </a:lnSpc>
             </a:pPr>
             <a:r>
-              <a:rPr lang="en-US" sz="6400" dirty="0" smtClean="0"/>
-              <a:t>Data-driven </a:t>
-            </a:r>
-            <a:r>
               <a:rPr lang="en-US" sz="6400" dirty="0"/>
-              <a:t>price prediction improves pricing decisions and market competitiveness.</a:t>
+              <a:t>Data-driven price prediction improves pricing decisions and market competitiveness.</a:t>
             </a:r>
           </a:p>
           <a:p>
@@ -6605,12 +6275,8 @@
               <a:buNone/>
             </a:pPr>
             <a:r>
-              <a:rPr lang="en-US" sz="7200" b="1" dirty="0" smtClean="0"/>
-              <a:t>Project </a:t>
-            </a:r>
-            <a:r>
               <a:rPr lang="en-US" sz="7200" b="1" dirty="0"/>
-              <a:t>Objectives</a:t>
+              <a:t>Project Objectives</a:t>
             </a:r>
           </a:p>
           <a:p>
@@ -6628,7 +6294,7 @@
               <a:t>Machine Learning</a:t>
             </a:r>
             <a:r>
-              <a:rPr lang="en-US" sz="6400" dirty="0" smtClean="0"/>
+              <a:rPr lang="en-US" sz="6400" dirty="0"/>
               <a:t>.</a:t>
             </a:r>
           </a:p>
@@ -6639,16 +6305,8 @@
               </a:lnSpc>
             </a:pPr>
             <a:r>
-              <a:rPr lang="en-US" sz="6400" dirty="0" smtClean="0"/>
-              <a:t> </a:t>
-            </a:r>
-            <a:r>
               <a:rPr lang="en-US" sz="6400" dirty="0"/>
-              <a:t>Identify the most influential features</a:t>
-            </a:r>
-            <a:r>
-              <a:rPr lang="en-US" sz="6400" dirty="0" smtClean="0"/>
-              <a:t>.</a:t>
+              <a:t> Identify the most influential features.</a:t>
             </a:r>
           </a:p>
           <a:p>
@@ -6658,12 +6316,8 @@
               </a:lnSpc>
             </a:pPr>
             <a:r>
-              <a:rPr lang="en-US" sz="6400" dirty="0" smtClean="0"/>
-              <a:t> </a:t>
-            </a:r>
-            <a:r>
               <a:rPr lang="en-US" sz="6400" dirty="0"/>
-              <a:t>Compare </a:t>
+              <a:t> Compare </a:t>
             </a:r>
             <a:r>
               <a:rPr lang="en-US" sz="6400" b="1" dirty="0"/>
@@ -6678,7 +6332,7 @@
               <a:t>Random Forest</a:t>
             </a:r>
             <a:r>
-              <a:rPr lang="en-US" sz="6400" dirty="0" smtClean="0"/>
+              <a:rPr lang="en-US" sz="6400" dirty="0"/>
               <a:t>.</a:t>
             </a:r>
           </a:p>
@@ -6689,12 +6343,8 @@
               </a:lnSpc>
             </a:pPr>
             <a:r>
-              <a:rPr lang="en-US" sz="6400" dirty="0" smtClean="0"/>
-              <a:t> </a:t>
-            </a:r>
-            <a:r>
               <a:rPr lang="en-US" sz="6400" dirty="0"/>
-              <a:t>Evaluate </a:t>
+              <a:t> Evaluate </a:t>
             </a:r>
             <a:r>
               <a:rPr lang="en-US" sz="6400" b="1" dirty="0"/>
@@ -6704,7 +6354,6 @@
               <a:rPr lang="en-US" sz="6400" dirty="0"/>
               <a:t>. </a:t>
             </a:r>
-            <a:endParaRPr lang="en-US" sz="6400" dirty="0" smtClean="0"/>
           </a:p>
           <a:p>
             <a:pPr>
@@ -6713,48 +6362,44 @@
               </a:lnSpc>
             </a:pPr>
             <a:r>
-              <a:rPr lang="en-US" sz="6400" dirty="0" smtClean="0"/>
+              <a:rPr lang="en-US" sz="6400" dirty="0"/>
               <a:t>Generate </a:t>
             </a:r>
             <a:r>
               <a:rPr lang="en-US" sz="6400" b="1" dirty="0"/>
-              <a:t>business recommendations</a:t>
-            </a:r>
-            <a:r>
-              <a:rPr lang="en-US" sz="6400" b="1" dirty="0" smtClean="0"/>
-              <a:t>.</a:t>
+              <a:t>business recommendations.</a:t>
             </a:r>
           </a:p>
           <a:p>
             <a:endParaRPr lang="en-US" dirty="0"/>
           </a:p>
           <a:p>
-            <a:endParaRPr lang="en-US" dirty="0" smtClean="0"/>
-          </a:p>
-          <a:p>
             <a:endParaRPr lang="en-US" dirty="0"/>
           </a:p>
           <a:p>
-            <a:endParaRPr lang="en-US" dirty="0" smtClean="0"/>
+            <a:endParaRPr lang="en-US" dirty="0"/>
+          </a:p>
+          <a:p>
+            <a:endParaRPr lang="en-US" dirty="0"/>
           </a:p>
           <a:p>
             <a:pPr algn="ctr"/>
             <a:endParaRPr lang="en-US" dirty="0"/>
           </a:p>
           <a:p>
-            <a:endParaRPr lang="en-US" dirty="0" smtClean="0"/>
-          </a:p>
-          <a:p>
-            <a:endParaRPr lang="en-US" dirty="0" smtClean="0"/>
-          </a:p>
-          <a:p>
             <a:endParaRPr lang="en-US" dirty="0"/>
           </a:p>
           <a:p>
-            <a:endParaRPr lang="en-US" dirty="0" smtClean="0"/>
-          </a:p>
-          <a:p>
-            <a:endParaRPr lang="en-US" dirty="0" smtClean="0"/>
+            <a:endParaRPr lang="en-US" dirty="0"/>
+          </a:p>
+          <a:p>
+            <a:endParaRPr lang="en-US" dirty="0"/>
+          </a:p>
+          <a:p>
+            <a:endParaRPr lang="en-US" dirty="0"/>
+          </a:p>
+          <a:p>
+            <a:endParaRPr lang="en-US" dirty="0"/>
           </a:p>
         </p:txBody>
       </p:sp>
@@ -6884,12 +6529,8 @@
               <a:buChar char="•"/>
             </a:pPr>
             <a:r>
-              <a:rPr lang="en-US" dirty="0" smtClean="0"/>
-              <a:t>Support </a:t>
-            </a:r>
-            <a:r>
               <a:rPr lang="en-US" dirty="0"/>
-              <a:t>product positioning.</a:t>
+              <a:t>Support product positioning.</a:t>
             </a:r>
           </a:p>
           <a:p>
@@ -6901,12 +6542,8 @@
               <a:buChar char="•"/>
             </a:pPr>
             <a:r>
-              <a:rPr lang="en-US" dirty="0" smtClean="0"/>
-              <a:t>Identify </a:t>
-            </a:r>
-            <a:r>
               <a:rPr lang="en-US" dirty="0"/>
-              <a:t>high-value features. </a:t>
+              <a:t>Identify high-value features. </a:t>
             </a:r>
           </a:p>
           <a:p>
@@ -7020,32 +6657,20 @@
           <a:p>
             <a:r>
               <a:rPr lang="en-IN" sz="1600" b="1" dirty="0"/>
-              <a:t>Dataset </a:t>
-            </a:r>
-            <a:r>
-              <a:rPr lang="en-IN" sz="1600" b="1" dirty="0" smtClean="0"/>
-              <a:t>Name  :</a:t>
-            </a:r>
-            <a:r>
-              <a:rPr lang="en-IN" sz="1600" dirty="0" smtClean="0"/>
-              <a:t> </a:t>
+              <a:t>Dataset Name  :</a:t>
             </a:r>
             <a:r>
               <a:rPr lang="en-IN" sz="1600" dirty="0"/>
-              <a:t>Mobile Phones Dataset </a:t>
+              <a:t> Mobile Phones Dataset </a:t>
             </a:r>
           </a:p>
           <a:p>
             <a:r>
               <a:rPr lang="en-IN" sz="1600" b="1" dirty="0"/>
-              <a:t>Total </a:t>
-            </a:r>
-            <a:r>
-              <a:rPr lang="en-IN" sz="1600" b="1" dirty="0" smtClean="0"/>
-              <a:t>Records    :</a:t>
-            </a:r>
-            <a:r>
-              <a:rPr lang="en-IN" sz="1600" dirty="0" smtClean="0"/>
+              <a:t>Total Records    :</a:t>
+            </a:r>
+            <a:r>
+              <a:rPr lang="en-IN" sz="1600" dirty="0"/>
               <a:t> </a:t>
             </a:r>
             <a:r>
@@ -7060,14 +6685,10 @@
           <a:p>
             <a:r>
               <a:rPr lang="en-IN" sz="1600" b="1" dirty="0"/>
-              <a:t>Input </a:t>
-            </a:r>
-            <a:r>
-              <a:rPr lang="en-IN" sz="1600" b="1" dirty="0" smtClean="0"/>
-              <a:t>Features  :</a:t>
-            </a:r>
-            <a:r>
-              <a:rPr lang="en-IN" sz="1600" dirty="0" smtClean="0"/>
+              <a:t>Input Features  :</a:t>
+            </a:r>
+            <a:r>
+              <a:rPr lang="en-IN" sz="1600" dirty="0"/>
               <a:t> </a:t>
             </a:r>
             <a:r>
@@ -7082,37 +6703,28 @@
           <a:p>
             <a:r>
               <a:rPr lang="en-IN" sz="1600" b="1" dirty="0"/>
-              <a:t>Target </a:t>
-            </a:r>
-            <a:r>
-              <a:rPr lang="en-IN" sz="1600" b="1" dirty="0" smtClean="0"/>
-              <a:t>Variable :</a:t>
-            </a:r>
-            <a:r>
-              <a:rPr lang="en-IN" sz="1600" dirty="0" smtClean="0"/>
+              <a:t>Target Variable :</a:t>
+            </a:r>
+            <a:r>
+              <a:rPr lang="en-IN" sz="1600" dirty="0"/>
               <a:t> </a:t>
             </a:r>
             <a:r>
-              <a:rPr lang="en-IN" sz="1600" b="1" dirty="0" smtClean="0"/>
+              <a:rPr lang="en-IN" sz="1600" b="1" dirty="0"/>
               <a:t>Prize </a:t>
             </a:r>
             <a:r>
-              <a:rPr lang="en-IN" sz="1600" dirty="0" smtClean="0"/>
+              <a:rPr lang="en-IN" sz="1600" dirty="0"/>
               <a:t> </a:t>
             </a:r>
-            <a:endParaRPr lang="en-IN" sz="1600" dirty="0"/>
           </a:p>
           <a:p>
             <a:r>
               <a:rPr lang="en-IN" sz="1600" b="1" dirty="0"/>
-              <a:t>Machine Learning </a:t>
-            </a:r>
-            <a:r>
-              <a:rPr lang="en-IN" sz="1600" b="1" dirty="0" smtClean="0"/>
-              <a:t>Task :</a:t>
-            </a:r>
-            <a:r>
-              <a:rPr lang="en-IN" sz="1600" dirty="0" smtClean="0"/>
+              <a:t>Machine Learning Task :</a:t>
+            </a:r>
+            <a:r>
+              <a:rPr lang="en-IN" sz="1600" dirty="0"/>
               <a:t> </a:t>
             </a:r>
             <a:r>
@@ -7127,108 +6739,75 @@
           <a:p>
             <a:r>
               <a:rPr lang="en-IN" sz="1600" b="1" dirty="0"/>
-              <a:t>Dataset </a:t>
-            </a:r>
-            <a:r>
-              <a:rPr lang="en-IN" sz="1600" b="1" dirty="0" smtClean="0"/>
-              <a:t>Purpose :</a:t>
-            </a:r>
-            <a:r>
-              <a:rPr lang="en-IN" sz="1600" dirty="0" smtClean="0"/>
+              <a:t>Dataset Purpose :</a:t>
+            </a:r>
+            <a:r>
+              <a:rPr lang="en-IN" sz="1600" dirty="0"/>
               <a:t> </a:t>
             </a:r>
             <a:r>
               <a:rPr lang="en-US" sz="1600" dirty="0"/>
               <a:t>Build a machine learning model to </a:t>
             </a:r>
-            <a:endParaRPr lang="en-US" sz="1600" dirty="0" smtClean="0"/>
           </a:p>
           <a:p>
             <a:pPr marL="0" indent="0">
               <a:buNone/>
             </a:pPr>
+            <a:r>
+              <a:rPr lang="en-US" sz="1600" dirty="0"/>
+              <a:t>                                         predict smartphone prices.</a:t>
+            </a:r>
+          </a:p>
+          <a:p>
+            <a:pPr marL="0" indent="0">
+              <a:buNone/>
+            </a:pPr>
+            <a:endParaRPr lang="en-US" sz="1600" b="1" dirty="0"/>
+          </a:p>
+          <a:p>
+            <a:pPr marL="0" indent="0">
+              <a:buNone/>
+            </a:pPr>
+            <a:r>
+              <a:rPr lang="en-US" sz="1800" b="1" dirty="0"/>
+              <a:t>Prediction Target</a:t>
+            </a:r>
+          </a:p>
+          <a:p>
+            <a:pPr marL="0" indent="0">
+              <a:buNone/>
+            </a:pPr>
+            <a:r>
+              <a:rPr lang="en-US" sz="1600" b="1" dirty="0"/>
+              <a:t>Target Variable :</a:t>
+            </a:r>
             <a:r>
               <a:rPr lang="en-US" sz="1600" dirty="0"/>
               <a:t> </a:t>
             </a:r>
             <a:r>
-              <a:rPr lang="en-US" sz="1600" dirty="0" smtClean="0"/>
-              <a:t>                                        predict </a:t>
-            </a:r>
+              <a:rPr lang="en-US" sz="1600" b="1" dirty="0"/>
+              <a:t>Prize </a:t>
+            </a:r>
+            <a:endParaRPr lang="en-US" sz="1600" dirty="0"/>
+          </a:p>
+          <a:p>
+            <a:pPr marL="0" indent="0">
+              <a:buNone/>
+            </a:pPr>
             <a:r>
               <a:rPr lang="en-US" sz="1600" dirty="0"/>
-              <a:t>smartphone prices</a:t>
-            </a:r>
-            <a:r>
-              <a:rPr lang="en-US" sz="1600" dirty="0" smtClean="0"/>
-              <a:t>.</a:t>
+              <a:t>The model learns the relationship between smartphone</a:t>
             </a:r>
           </a:p>
           <a:p>
             <a:pPr marL="0" indent="0">
               <a:buNone/>
             </a:pPr>
-            <a:endParaRPr lang="en-US" sz="1600" b="1" dirty="0"/>
-          </a:p>
-          <a:p>
-            <a:pPr marL="0" indent="0">
-              <a:buNone/>
-            </a:pPr>
-            <a:r>
-              <a:rPr lang="en-US" sz="1800" b="1" dirty="0" smtClean="0"/>
-              <a:t>Prediction </a:t>
-            </a:r>
-            <a:r>
-              <a:rPr lang="en-US" sz="1800" b="1" dirty="0"/>
-              <a:t>Target</a:t>
-            </a:r>
-          </a:p>
-          <a:p>
-            <a:pPr marL="0" indent="0">
-              <a:buNone/>
-            </a:pPr>
-            <a:r>
-              <a:rPr lang="en-US" sz="1600" b="1" dirty="0"/>
-              <a:t>Target </a:t>
-            </a:r>
-            <a:r>
-              <a:rPr lang="en-US" sz="1600" b="1" dirty="0" smtClean="0"/>
-              <a:t>Variable :</a:t>
-            </a:r>
-            <a:r>
-              <a:rPr lang="en-US" sz="1600" dirty="0" smtClean="0"/>
-              <a:t> </a:t>
-            </a:r>
-            <a:r>
-              <a:rPr lang="en-US" sz="1600" b="1" dirty="0" smtClean="0"/>
-              <a:t>Prize </a:t>
-            </a:r>
-            <a:endParaRPr lang="en-US" sz="1600" dirty="0"/>
-          </a:p>
-          <a:p>
-            <a:pPr marL="0" indent="0">
-              <a:buNone/>
-            </a:pPr>
             <a:r>
               <a:rPr lang="en-US" sz="1600" dirty="0"/>
-              <a:t>The model learns the relationship between </a:t>
-            </a:r>
-            <a:r>
-              <a:rPr lang="en-US" sz="1600" dirty="0" smtClean="0"/>
-              <a:t>smartphone</a:t>
-            </a:r>
-          </a:p>
-          <a:p>
-            <a:pPr marL="0" indent="0">
-              <a:buNone/>
-            </a:pPr>
-            <a:r>
-              <a:rPr lang="en-US" sz="1600" dirty="0" smtClean="0"/>
-              <a:t> </a:t>
-            </a:r>
-            <a:r>
-              <a:rPr lang="en-US" sz="1600" dirty="0"/>
-              <a:t>specifications and price to predict prices for new smartphones.</a:t>
+              <a:t> specifications and price to predict prices for new smartphones.</a:t>
             </a:r>
             <a:endParaRPr lang="en-IN" sz="1600" dirty="0"/>
           </a:p>
@@ -7312,12 +6891,8 @@
           </a:p>
           <a:p>
             <a:r>
-              <a:rPr lang="en-IN" sz="1600" b="1" dirty="0" smtClean="0"/>
-              <a:t>Device </a:t>
-            </a:r>
-            <a:r>
               <a:rPr lang="en-IN" sz="1600" b="1" dirty="0"/>
-              <a:t>Information</a:t>
+              <a:t>Device Information</a:t>
             </a:r>
           </a:p>
           <a:p>
@@ -7340,12 +6915,8 @@
           </a:p>
           <a:p>
             <a:r>
-              <a:rPr lang="en-IN" sz="1600" b="1" dirty="0" smtClean="0"/>
-              <a:t>Hardware </a:t>
-            </a:r>
-            <a:r>
               <a:rPr lang="en-IN" sz="1600" b="1" dirty="0"/>
-              <a:t>Specifications</a:t>
+              <a:t>Hardware Specifications</a:t>
             </a:r>
           </a:p>
           <a:p>
@@ -7380,12 +6951,8 @@
           </a:p>
           <a:p>
             <a:r>
-              <a:rPr lang="en-IN" sz="1600" b="1" dirty="0" smtClean="0"/>
-              <a:t>Camera </a:t>
-            </a:r>
-            <a:r>
               <a:rPr lang="en-IN" sz="1600" b="1" dirty="0"/>
-              <a:t>Features</a:t>
+              <a:t>Camera Features</a:t>
             </a:r>
           </a:p>
           <a:p>
@@ -7414,12 +6981,8 @@
           </a:p>
           <a:p>
             <a:r>
-              <a:rPr lang="en-IN" sz="1600" b="1" dirty="0" smtClean="0"/>
-              <a:t>Engineered </a:t>
-            </a:r>
-            <a:r>
               <a:rPr lang="en-IN" sz="1600" b="1" dirty="0"/>
-              <a:t>Features</a:t>
+              <a:t>Engineered Features</a:t>
             </a:r>
           </a:p>
           <a:p>
@@ -7618,12 +7181,8 @@
               <a:t>Created </a:t>
             </a:r>
             <a:r>
-              <a:rPr lang="en-US" sz="2100" b="1" dirty="0" smtClean="0"/>
-              <a:t>Color </a:t>
-            </a:r>
-            <a:r>
               <a:rPr lang="en-US" sz="2100" b="1" dirty="0"/>
-              <a:t>Category</a:t>
+              <a:t>Color Category</a:t>
             </a:r>
             <a:r>
               <a:rPr lang="en-US" sz="2100" dirty="0"/>
@@ -7703,15 +7262,7 @@
             </a:r>
             <a:r>
               <a:rPr lang="en-US" sz="2100" dirty="0"/>
-              <a:t> </a:t>
-            </a:r>
-            <a:r>
-              <a:rPr lang="en-US" sz="2100" dirty="0" smtClean="0"/>
-              <a:t>Prize </a:t>
-            </a:r>
-            <a:r>
-              <a:rPr lang="en-US" sz="2100" dirty="0"/>
-              <a:t>(₹)</a:t>
+              <a:t> Prize (₹)</a:t>
             </a:r>
           </a:p>
           <a:p>
@@ -7788,10 +7339,10 @@
           <a:lstStyle/>
           <a:p>
             <a:r>
-              <a:rPr lang="en-US" b="1" dirty="0" smtClean="0"/>
+              <a:rPr lang="en-US" b="1" dirty="0"/>
               <a:t>Preprocessing Workflow :</a:t>
             </a:r>
-            <a:endParaRPr lang="en-IN" b="1" dirty="0" smtClean="0"/>
+            <a:endParaRPr lang="en-IN" b="1" dirty="0"/>
           </a:p>
           <a:p>
             <a:endParaRPr lang="en-IN" dirty="0"/>
@@ -8014,12 +7565,8 @@
               <a:buNone/>
             </a:pPr>
             <a:r>
-              <a:rPr lang="en-US" sz="2100" b="1" dirty="0" smtClean="0"/>
-              <a:t>Key </a:t>
-            </a:r>
-            <a:r>
               <a:rPr lang="en-US" sz="2100" b="1" dirty="0"/>
-              <a:t>Outcome</a:t>
+              <a:t>Key Outcome</a:t>
             </a:r>
           </a:p>
           <a:p>
@@ -8561,26 +8108,20 @@
               <a:rPr lang="en-US" sz="1600" dirty="0"/>
               <a:t> are generally associated with higher smartphone prices. </a:t>
             </a:r>
-            <a:endParaRPr lang="en-US" sz="1600" dirty="0" smtClean="0"/>
-          </a:p>
-          <a:p>
-            <a:r>
-              <a:rPr lang="en-US" sz="1600" b="1" dirty="0" smtClean="0"/>
-              <a:t>Camera </a:t>
-            </a:r>
+          </a:p>
+          <a:p>
             <a:r>
               <a:rPr lang="en-US" sz="1600" b="1" dirty="0"/>
-              <a:t>specifications</a:t>
+              <a:t>Camera specifications</a:t>
             </a:r>
             <a:r>
               <a:rPr lang="en-US" sz="1600" dirty="0"/>
               <a:t> show a positive relationship with price. </a:t>
             </a:r>
-            <a:endParaRPr lang="en-US" sz="1600" dirty="0" smtClean="0"/>
-          </a:p>
-          <a:p>
-            <a:r>
-              <a:rPr lang="en-US" sz="1600" dirty="0" smtClean="0"/>
+          </a:p>
+          <a:p>
+            <a:r>
+              <a:rPr lang="en-US" sz="1600" dirty="0"/>
               <a:t>The </a:t>
             </a:r>
             <a:r>
@@ -8788,18 +8329,14 @@
               <a:buNone/>
             </a:pPr>
             <a:r>
-              <a:rPr lang="en-US" sz="1800" b="1" dirty="0" smtClean="0"/>
+              <a:rPr lang="en-US" sz="1800" b="1" dirty="0"/>
               <a:t>Objective</a:t>
             </a:r>
           </a:p>
           <a:p>
             <a:r>
-              <a:rPr lang="en-US" sz="1700" dirty="0" smtClean="0"/>
-              <a:t>Analyze </a:t>
-            </a:r>
-            <a:r>
               <a:rPr lang="en-US" sz="1700" dirty="0"/>
-              <a:t>the combined effect of multiple features on smartphone price. </a:t>
+              <a:t>Analyze the combined effect of multiple features on smartphone price. </a:t>
             </a:r>
           </a:p>
           <a:p>
